--- a/docs/選定結果フィードバック_PwCコンサルティング様.pptx
+++ b/docs/選定結果フィードバック_PwCコンサルティング様.pptx
@@ -2566,7 +2566,7 @@
                 <a:ea typeface="Meiryo" pitchFamily="34" charset="-122"/>
                 <a:cs typeface="Meiryo" pitchFamily="34" charset="-120"/>
               </a:rPr>
-              <a:t>評価に差が生じた観点を、今後のご参考として率直にお伝えいたします。後続フェーズや他のテーマでは改めてご相談させていただく可能性がございますので、引き続きのご関係をお願い申し上げます。</a:t>
+              <a:t>評価に差が生じた観点と、それぞれの改善要素を今後のご参考として率直にお伝えいたします。後続フェーズや他のテーマでは改めてご相談させていただく可能性がございますので、引き続きのご関係をお願い申し上げます。</a:t>
             </a:r>
             <a:endParaRPr lang="en-US" sz="1100" dirty="0"/>
           </a:p>
@@ -2649,7 +2649,7 @@
                 <a:ea typeface="Meiryo" pitchFamily="34" charset="-122"/>
                 <a:cs typeface="Meiryo" pitchFamily="34" charset="-120"/>
               </a:rPr>
-              <a:t>評価に差が生じた主な観点（弊社採点表より）</a:t>
+              <a:t>評価に差が生じた観点と、次回に向けた改善要素</a:t>
             </a:r>
             <a:endParaRPr lang="en-US" sz="1450" dirty="0"/>
           </a:p>
@@ -2692,7 +2692,7 @@
         </p:nvSpPr>
         <p:spPr>
           <a:xfrm>
-            <a:off x="667512" y="2304288"/>
+            <a:off x="667512" y="2286000"/>
             <a:ext cx="384048" cy="384048"/>
           </a:xfrm>
           <a:prstGeom prst="ellipse">
@@ -2720,7 +2720,7 @@
         </p:blipFill>
         <p:spPr>
           <a:xfrm>
-            <a:off x="754380" y="2391156"/>
+            <a:off x="754380" y="2372868"/>
             <a:ext cx="210312" cy="210312"/>
           </a:xfrm>
           <a:prstGeom prst="rect">
@@ -2736,8 +2736,8 @@
         </p:nvSpPr>
         <p:spPr>
           <a:xfrm>
-            <a:off x="1161288" y="2286000"/>
-            <a:ext cx="6099048" cy="438912"/>
+            <a:off x="1161288" y="2267712"/>
+            <a:ext cx="6099048" cy="402336"/>
           </a:xfrm>
           <a:prstGeom prst="rect">
             <a:avLst/>
@@ -2775,8 +2775,8 @@
         </p:nvSpPr>
         <p:spPr>
           <a:xfrm>
-            <a:off x="704088" y="2816352"/>
-            <a:ext cx="6501384" cy="566928"/>
+            <a:off x="704088" y="2743200"/>
+            <a:ext cx="3858768" cy="658368"/>
           </a:xfrm>
           <a:prstGeom prst="rect">
             <a:avLst/>
@@ -2790,12 +2790,12 @@
           <a:p>
             <a:pPr indent="0" marL="0">
               <a:lnSpc>
-                <a:spcPct val="112000"/>
+                <a:spcPct val="110000"/>
               </a:lnSpc>
               <a:buNone/>
             </a:pPr>
             <a:r>
-              <a:rPr lang="en-US" sz="980" dirty="0">
+              <a:rPr lang="en-US" sz="940" dirty="0">
                 <a:solidFill>
                   <a:srgbClr val="26303B"/>
                 </a:solidFill>
@@ -2803,15 +2803,119 @@
                 <a:ea typeface="Meiryo" pitchFamily="34" charset="-122"/>
                 <a:cs typeface="Meiryo" pitchFamily="34" charset="-120"/>
               </a:rPr>
-              <a:t>弊社依頼書の中核である「非財務情報の財務化・経営活用（攻め）」について、課題理解としては的確にご言及いただいた一方、実行計画・体制・成果物への具体的な落とし込みが確認できませんでした。この点が品質評価における最大の差分となりました。</a:t>
-            </a:r>
-            <a:endParaRPr lang="en-US" sz="980" dirty="0"/>
+              <a:t>弊社依頼書の中核である「非財務情報の財務化・経営活用（攻め）」について、課題理解としては的確にご言及いただいた一方、実行計画・体制・成果物への具体的な落とし込みが確認できず、品質評価における最大の差分となりました。</a:t>
+            </a:r>
+            <a:endParaRPr lang="en-US" sz="940" dirty="0"/>
           </a:p>
         </p:txBody>
       </p:sp>
       <p:sp>
         <p:nvSpPr>
           <p:cNvPr id="14" name="Shape 10"/>
+          <p:cNvSpPr/>
+          <p:nvPr/>
+        </p:nvSpPr>
+        <p:spPr>
+          <a:xfrm>
+            <a:off x="4727448" y="2761488"/>
+            <a:ext cx="0" cy="603504"/>
+          </a:xfrm>
+          <a:prstGeom prst="line">
+            <a:avLst/>
+          </a:prstGeom>
+          <a:noFill/>
+          <a:ln w="12700">
+            <a:solidFill>
+              <a:srgbClr val="C9D5E6"/>
+            </a:solidFill>
+            <a:prstDash val="solid"/>
+          </a:ln>
+        </p:spPr>
+      </p:sp>
+      <p:sp>
+        <p:nvSpPr>
+          <p:cNvPr id="15" name="Text 11"/>
+          <p:cNvSpPr txBox="1"/>
+          <p:nvPr/>
+        </p:nvSpPr>
+        <p:spPr>
+          <a:xfrm>
+            <a:off x="4873752" y="2706624"/>
+            <a:ext cx="2350008" cy="237744"/>
+          </a:xfrm>
+          <a:prstGeom prst="rect">
+            <a:avLst/>
+          </a:prstGeom>
+          <a:noFill/>
+          <a:ln/>
+        </p:spPr>
+        <p:txBody>
+          <a:bodyPr wrap="square" lIns="0" tIns="0" rIns="0" bIns="0" rtlCol="0" anchor="ctr"/>
+          <a:lstStyle/>
+          <a:p>
+            <a:pPr indent="0" marL="0">
+              <a:buNone/>
+            </a:pPr>
+            <a:r>
+              <a:rPr lang="en-US" sz="920" b="1" dirty="0">
+                <a:solidFill>
+                  <a:srgbClr val="1F3864"/>
+                </a:solidFill>
+                <a:latin typeface="Meiryo" pitchFamily="34" charset="0"/>
+                <a:ea typeface="Meiryo" pitchFamily="34" charset="-122"/>
+                <a:cs typeface="Meiryo" pitchFamily="34" charset="-120"/>
+              </a:rPr>
+              <a:t>改善要素</a:t>
+            </a:r>
+            <a:endParaRPr lang="en-US" sz="920" dirty="0"/>
+          </a:p>
+        </p:txBody>
+      </p:sp>
+      <p:sp>
+        <p:nvSpPr>
+          <p:cNvPr id="16" name="Text 12"/>
+          <p:cNvSpPr txBox="1"/>
+          <p:nvPr/>
+        </p:nvSpPr>
+        <p:spPr>
+          <a:xfrm>
+            <a:off x="4873752" y="2962656"/>
+            <a:ext cx="2350008" cy="457200"/>
+          </a:xfrm>
+          <a:prstGeom prst="rect">
+            <a:avLst/>
+          </a:prstGeom>
+          <a:noFill/>
+          <a:ln/>
+        </p:spPr>
+        <p:txBody>
+          <a:bodyPr wrap="square" lIns="0" tIns="0" rIns="0" bIns="0" rtlCol="0" anchor="t"/>
+          <a:lstStyle/>
+          <a:p>
+            <a:pPr indent="0" marL="0">
+              <a:lnSpc>
+                <a:spcPct val="108000"/>
+              </a:lnSpc>
+              <a:buNone/>
+            </a:pPr>
+            <a:r>
+              <a:rPr lang="en-US" sz="900" dirty="0">
+                <a:solidFill>
+                  <a:srgbClr val="26303B"/>
+                </a:solidFill>
+                <a:latin typeface="Meiryo" pitchFamily="34" charset="0"/>
+                <a:ea typeface="Meiryo" pitchFamily="34" charset="-122"/>
+                <a:cs typeface="Meiryo" pitchFamily="34" charset="-120"/>
+              </a:rPr>
+              <a:t>課題理解をWBS・成果物一覧・担当体制まで一気通貫で落とし込み、「攻め」の検討がどの工程で・誰により・何の形で行われるかを明示。</a:t>
+            </a:r>
+            <a:endParaRPr lang="en-US" sz="900" dirty="0"/>
+          </a:p>
+        </p:txBody>
+      </p:sp>
+      <p:sp>
+        <p:nvSpPr>
+          <p:cNvPr id="17" name="Shape 13"/>
           <p:cNvSpPr/>
           <p:nvPr/>
         </p:nvSpPr>
@@ -2840,13 +2944,13 @@
       </p:sp>
       <p:sp>
         <p:nvSpPr>
-          <p:cNvPr id="15" name="Shape 11"/>
+          <p:cNvPr id="18" name="Shape 14"/>
           <p:cNvSpPr/>
           <p:nvPr/>
         </p:nvSpPr>
         <p:spPr>
           <a:xfrm>
-            <a:off x="667512" y="3822192"/>
+            <a:off x="667512" y="3803904"/>
             <a:ext cx="384048" cy="384048"/>
           </a:xfrm>
           <a:prstGeom prst="ellipse">
@@ -2860,7 +2964,7 @@
       </p:sp>
       <p:pic>
         <p:nvPicPr>
-          <p:cNvPr id="16" name="Image 2" descr="preencoded.png">    </p:cNvPr>
+          <p:cNvPr id="19" name="Image 2" descr="preencoded.png">    </p:cNvPr>
           <p:cNvPicPr>
             <a:picLocks noChangeAspect="1"/>
           </p:cNvPicPr>
@@ -2874,7 +2978,7 @@
         </p:blipFill>
         <p:spPr>
           <a:xfrm>
-            <a:off x="754380" y="3909060"/>
+            <a:off x="754380" y="3890772"/>
             <a:ext cx="210312" cy="210312"/>
           </a:xfrm>
           <a:prstGeom prst="rect">
@@ -2884,14 +2988,14 @@
       </p:pic>
       <p:sp>
         <p:nvSpPr>
-          <p:cNvPr id="17" name="Text 12"/>
+          <p:cNvPr id="20" name="Text 15"/>
           <p:cNvSpPr txBox="1"/>
           <p:nvPr/>
         </p:nvSpPr>
         <p:spPr>
           <a:xfrm>
-            <a:off x="1161288" y="3803904"/>
-            <a:ext cx="6099048" cy="438912"/>
+            <a:off x="1161288" y="3785616"/>
+            <a:ext cx="6099048" cy="402336"/>
           </a:xfrm>
           <a:prstGeom prst="rect">
             <a:avLst/>
@@ -2923,14 +3027,14 @@
       </p:sp>
       <p:sp>
         <p:nvSpPr>
-          <p:cNvPr id="18" name="Text 13"/>
+          <p:cNvPr id="21" name="Text 16"/>
           <p:cNvSpPr txBox="1"/>
           <p:nvPr/>
         </p:nvSpPr>
         <p:spPr>
           <a:xfrm>
-            <a:off x="704088" y="4334256"/>
-            <a:ext cx="6501384" cy="566928"/>
+            <a:off x="704088" y="4261104"/>
+            <a:ext cx="3858768" cy="658368"/>
           </a:xfrm>
           <a:prstGeom prst="rect">
             <a:avLst/>
@@ -2944,12 +3048,12 @@
           <a:p>
             <a:pPr indent="0" marL="0">
               <a:lnSpc>
-                <a:spcPct val="112000"/>
+                <a:spcPct val="110000"/>
               </a:lnSpc>
               <a:buNone/>
             </a:pPr>
             <a:r>
-              <a:rPr lang="en-US" sz="980" dirty="0">
+              <a:rPr lang="en-US" sz="940" dirty="0">
                 <a:solidFill>
                   <a:srgbClr val="26303B"/>
                 </a:solidFill>
@@ -2957,15 +3061,119 @@
                 <a:ea typeface="Meiryo" pitchFamily="34" charset="-122"/>
                 <a:cs typeface="Meiryo" pitchFamily="34" charset="-120"/>
               </a:rPr>
-              <a:t>ご提案の支援スタンスでは、成果物の完遂責任の所在が弊社には確認しづらく、「支援」の範囲に留まる印象を受けました。工程・成果物単位での完遂責任と検収基準の明確なご提示があれば、評価は大きく変わったと考えております。</a:t>
-            </a:r>
-            <a:endParaRPr lang="en-US" sz="980" dirty="0"/>
-          </a:p>
-        </p:txBody>
-      </p:sp>
-      <p:sp>
-        <p:nvSpPr>
-          <p:cNvPr id="19" name="Shape 14"/>
+              <a:t>ご提案の支援スタンスでは成果物の完遂責任の所在が確認しづらく、「支援」の範囲に留まる印象を受けました。完遂責任の明確なご提示があれば、評価は大きく変わったと考えております。</a:t>
+            </a:r>
+            <a:endParaRPr lang="en-US" sz="940" dirty="0"/>
+          </a:p>
+        </p:txBody>
+      </p:sp>
+      <p:sp>
+        <p:nvSpPr>
+          <p:cNvPr id="22" name="Shape 17"/>
+          <p:cNvSpPr/>
+          <p:nvPr/>
+        </p:nvSpPr>
+        <p:spPr>
+          <a:xfrm>
+            <a:off x="4727448" y="4279392"/>
+            <a:ext cx="0" cy="603504"/>
+          </a:xfrm>
+          <a:prstGeom prst="line">
+            <a:avLst/>
+          </a:prstGeom>
+          <a:noFill/>
+          <a:ln w="12700">
+            <a:solidFill>
+              <a:srgbClr val="C9D5E6"/>
+            </a:solidFill>
+            <a:prstDash val="solid"/>
+          </a:ln>
+        </p:spPr>
+      </p:sp>
+      <p:sp>
+        <p:nvSpPr>
+          <p:cNvPr id="23" name="Text 18"/>
+          <p:cNvSpPr txBox="1"/>
+          <p:nvPr/>
+        </p:nvSpPr>
+        <p:spPr>
+          <a:xfrm>
+            <a:off x="4873752" y="4224528"/>
+            <a:ext cx="2350008" cy="237744"/>
+          </a:xfrm>
+          <a:prstGeom prst="rect">
+            <a:avLst/>
+          </a:prstGeom>
+          <a:noFill/>
+          <a:ln/>
+        </p:spPr>
+        <p:txBody>
+          <a:bodyPr wrap="square" lIns="0" tIns="0" rIns="0" bIns="0" rtlCol="0" anchor="ctr"/>
+          <a:lstStyle/>
+          <a:p>
+            <a:pPr indent="0" marL="0">
+              <a:buNone/>
+            </a:pPr>
+            <a:r>
+              <a:rPr lang="en-US" sz="920" b="1" dirty="0">
+                <a:solidFill>
+                  <a:srgbClr val="1F3864"/>
+                </a:solidFill>
+                <a:latin typeface="Meiryo" pitchFamily="34" charset="0"/>
+                <a:ea typeface="Meiryo" pitchFamily="34" charset="-122"/>
+                <a:cs typeface="Meiryo" pitchFamily="34" charset="-120"/>
+              </a:rPr>
+              <a:t>改善要素</a:t>
+            </a:r>
+            <a:endParaRPr lang="en-US" sz="920" dirty="0"/>
+          </a:p>
+        </p:txBody>
+      </p:sp>
+      <p:sp>
+        <p:nvSpPr>
+          <p:cNvPr id="24" name="Text 19"/>
+          <p:cNvSpPr txBox="1"/>
+          <p:nvPr/>
+        </p:nvSpPr>
+        <p:spPr>
+          <a:xfrm>
+            <a:off x="4873752" y="4480560"/>
+            <a:ext cx="2350008" cy="457200"/>
+          </a:xfrm>
+          <a:prstGeom prst="rect">
+            <a:avLst/>
+          </a:prstGeom>
+          <a:noFill/>
+          <a:ln/>
+        </p:spPr>
+        <p:txBody>
+          <a:bodyPr wrap="square" lIns="0" tIns="0" rIns="0" bIns="0" rtlCol="0" anchor="t"/>
+          <a:lstStyle/>
+          <a:p>
+            <a:pPr indent="0" marL="0">
+              <a:lnSpc>
+                <a:spcPct val="108000"/>
+              </a:lnSpc>
+              <a:buNone/>
+            </a:pPr>
+            <a:r>
+              <a:rPr lang="en-US" sz="900" dirty="0">
+                <a:solidFill>
+                  <a:srgbClr val="26303B"/>
+                </a:solidFill>
+                <a:latin typeface="Meiryo" pitchFamily="34" charset="0"/>
+                <a:ea typeface="Meiryo" pitchFamily="34" charset="-122"/>
+                <a:cs typeface="Meiryo" pitchFamily="34" charset="-120"/>
+              </a:rPr>
+              <a:t>成果物単位の完遂責任・検収基準・再作業条件を契約条件として明記し、「支援」ではなく「完遂」のコミットを提示。</a:t>
+            </a:r>
+            <a:endParaRPr lang="en-US" sz="900" dirty="0"/>
+          </a:p>
+        </p:txBody>
+      </p:sp>
+      <p:sp>
+        <p:nvSpPr>
+          <p:cNvPr id="25" name="Shape 20"/>
           <p:cNvSpPr/>
           <p:nvPr/>
         </p:nvSpPr>
@@ -2994,13 +3202,13 @@
       </p:sp>
       <p:sp>
         <p:nvSpPr>
-          <p:cNvPr id="20" name="Shape 15"/>
+          <p:cNvPr id="26" name="Shape 21"/>
           <p:cNvSpPr/>
           <p:nvPr/>
         </p:nvSpPr>
         <p:spPr>
           <a:xfrm>
-            <a:off x="667512" y="5340096"/>
+            <a:off x="667512" y="5321808"/>
             <a:ext cx="384048" cy="384048"/>
           </a:xfrm>
           <a:prstGeom prst="ellipse">
@@ -3014,7 +3222,7 @@
       </p:sp>
       <p:pic>
         <p:nvPicPr>
-          <p:cNvPr id="21" name="Image 3" descr="preencoded.png">    </p:cNvPr>
+          <p:cNvPr id="27" name="Image 3" descr="preencoded.png">    </p:cNvPr>
           <p:cNvPicPr>
             <a:picLocks noChangeAspect="1"/>
           </p:cNvPicPr>
@@ -3028,7 +3236,7 @@
         </p:blipFill>
         <p:spPr>
           <a:xfrm>
-            <a:off x="754380" y="5426964"/>
+            <a:off x="754380" y="5408676"/>
             <a:ext cx="210312" cy="210312"/>
           </a:xfrm>
           <a:prstGeom prst="rect">
@@ -3038,14 +3246,14 @@
       </p:pic>
       <p:sp>
         <p:nvSpPr>
-          <p:cNvPr id="22" name="Text 16"/>
+          <p:cNvPr id="28" name="Text 22"/>
           <p:cNvSpPr txBox="1"/>
           <p:nvPr/>
         </p:nvSpPr>
         <p:spPr>
           <a:xfrm>
-            <a:off x="1161288" y="5321808"/>
-            <a:ext cx="6099048" cy="438912"/>
+            <a:off x="1161288" y="5303520"/>
+            <a:ext cx="6099048" cy="402336"/>
           </a:xfrm>
           <a:prstGeom prst="rect">
             <a:avLst/>
@@ -3077,14 +3285,14 @@
       </p:sp>
       <p:sp>
         <p:nvSpPr>
-          <p:cNvPr id="23" name="Text 17"/>
+          <p:cNvPr id="29" name="Text 23"/>
           <p:cNvSpPr txBox="1"/>
           <p:nvPr/>
         </p:nvSpPr>
         <p:spPr>
           <a:xfrm>
-            <a:off x="704088" y="5852160"/>
-            <a:ext cx="6501384" cy="566928"/>
+            <a:off x="704088" y="5779008"/>
+            <a:ext cx="3858768" cy="658368"/>
           </a:xfrm>
           <a:prstGeom prst="rect">
             <a:avLst/>
@@ -3098,12 +3306,12 @@
           <a:p>
             <a:pPr indent="0" marL="0">
               <a:lnSpc>
-                <a:spcPct val="112000"/>
+                <a:spcPct val="110000"/>
               </a:lnSpc>
               <a:buNone/>
             </a:pPr>
             <a:r>
-              <a:rPr lang="en-US" sz="980" dirty="0">
+              <a:rPr lang="en-US" sz="940" dirty="0">
                 <a:solidFill>
                   <a:srgbClr val="26303B"/>
                 </a:solidFill>
@@ -3111,15 +3319,119 @@
                 <a:ea typeface="Meiryo" pitchFamily="34" charset="-122"/>
                 <a:cs typeface="Meiryo" pitchFamily="34" charset="-120"/>
               </a:rPr>
-              <a:t>全体スケジュール上、要件定義工程への作業集中（クリティカルパス化）が見られ、拠点調査と並行して進めた場合の負荷分散と実現性に懸念が残りました。工程間の依存関係を織り込んだ平準化のご提示を期待しておりました。</a:t>
-            </a:r>
-            <a:endParaRPr lang="en-US" sz="980" dirty="0"/>
-          </a:p>
-        </p:txBody>
-      </p:sp>
-      <p:sp>
-        <p:nvSpPr>
-          <p:cNvPr id="24" name="Shape 18"/>
+              <a:t>全体スケジュール上、要件定義工程への作業集中（クリティカルパス化）が見られ、拠点調査と並行して進めた場合の負荷分散と実現性に懸念が残りました。</a:t>
+            </a:r>
+            <a:endParaRPr lang="en-US" sz="940" dirty="0"/>
+          </a:p>
+        </p:txBody>
+      </p:sp>
+      <p:sp>
+        <p:nvSpPr>
+          <p:cNvPr id="30" name="Shape 24"/>
+          <p:cNvSpPr/>
+          <p:nvPr/>
+        </p:nvSpPr>
+        <p:spPr>
+          <a:xfrm>
+            <a:off x="4727448" y="5797296"/>
+            <a:ext cx="0" cy="603504"/>
+          </a:xfrm>
+          <a:prstGeom prst="line">
+            <a:avLst/>
+          </a:prstGeom>
+          <a:noFill/>
+          <a:ln w="12700">
+            <a:solidFill>
+              <a:srgbClr val="C9D5E6"/>
+            </a:solidFill>
+            <a:prstDash val="solid"/>
+          </a:ln>
+        </p:spPr>
+      </p:sp>
+      <p:sp>
+        <p:nvSpPr>
+          <p:cNvPr id="31" name="Text 25"/>
+          <p:cNvSpPr txBox="1"/>
+          <p:nvPr/>
+        </p:nvSpPr>
+        <p:spPr>
+          <a:xfrm>
+            <a:off x="4873752" y="5742432"/>
+            <a:ext cx="2350008" cy="237744"/>
+          </a:xfrm>
+          <a:prstGeom prst="rect">
+            <a:avLst/>
+          </a:prstGeom>
+          <a:noFill/>
+          <a:ln/>
+        </p:spPr>
+        <p:txBody>
+          <a:bodyPr wrap="square" lIns="0" tIns="0" rIns="0" bIns="0" rtlCol="0" anchor="ctr"/>
+          <a:lstStyle/>
+          <a:p>
+            <a:pPr indent="0" marL="0">
+              <a:buNone/>
+            </a:pPr>
+            <a:r>
+              <a:rPr lang="en-US" sz="920" b="1" dirty="0">
+                <a:solidFill>
+                  <a:srgbClr val="1F3864"/>
+                </a:solidFill>
+                <a:latin typeface="Meiryo" pitchFamily="34" charset="0"/>
+                <a:ea typeface="Meiryo" pitchFamily="34" charset="-122"/>
+                <a:cs typeface="Meiryo" pitchFamily="34" charset="-120"/>
+              </a:rPr>
+              <a:t>改善要素</a:t>
+            </a:r>
+            <a:endParaRPr lang="en-US" sz="920" dirty="0"/>
+          </a:p>
+        </p:txBody>
+      </p:sp>
+      <p:sp>
+        <p:nvSpPr>
+          <p:cNvPr id="32" name="Text 26"/>
+          <p:cNvSpPr txBox="1"/>
+          <p:nvPr/>
+        </p:nvSpPr>
+        <p:spPr>
+          <a:xfrm>
+            <a:off x="4873752" y="5998464"/>
+            <a:ext cx="2350008" cy="457200"/>
+          </a:xfrm>
+          <a:prstGeom prst="rect">
+            <a:avLst/>
+          </a:prstGeom>
+          <a:noFill/>
+          <a:ln/>
+        </p:spPr>
+        <p:txBody>
+          <a:bodyPr wrap="square" lIns="0" tIns="0" rIns="0" bIns="0" rtlCol="0" anchor="t"/>
+          <a:lstStyle/>
+          <a:p>
+            <a:pPr indent="0" marL="0">
+              <a:lnSpc>
+                <a:spcPct val="108000"/>
+              </a:lnSpc>
+              <a:buNone/>
+            </a:pPr>
+            <a:r>
+              <a:rPr lang="en-US" sz="900" dirty="0">
+                <a:solidFill>
+                  <a:srgbClr val="26303B"/>
+                </a:solidFill>
+                <a:latin typeface="Meiryo" pitchFamily="34" charset="0"/>
+                <a:ea typeface="Meiryo" pitchFamily="34" charset="-122"/>
+                <a:cs typeface="Meiryo" pitchFamily="34" charset="-120"/>
+              </a:rPr>
+              <a:t>クリティカルパスの分散と、並行作業を前提とした要員・負荷の平準化計画（依存関係を織り込んだWBS）の提示。</a:t>
+            </a:r>
+            <a:endParaRPr lang="en-US" sz="900" dirty="0"/>
+          </a:p>
+        </p:txBody>
+      </p:sp>
+      <p:sp>
+        <p:nvSpPr>
+          <p:cNvPr id="33" name="Shape 27"/>
           <p:cNvSpPr/>
           <p:nvPr/>
         </p:nvSpPr>
@@ -3139,7 +3451,7 @@
       </p:sp>
       <p:pic>
         <p:nvPicPr>
-          <p:cNvPr id="25" name="Image 4" descr="preencoded.png">    </p:cNvPr>
+          <p:cNvPr id="34" name="Image 4" descr="preencoded.png">    </p:cNvPr>
           <p:cNvPicPr>
             <a:picLocks noChangeAspect="1"/>
           </p:cNvPicPr>
@@ -3163,7 +3475,7 @@
       </p:pic>
       <p:sp>
         <p:nvSpPr>
-          <p:cNvPr id="26" name="Text 19"/>
+          <p:cNvPr id="35" name="Text 28"/>
           <p:cNvSpPr txBox="1"/>
           <p:nvPr/>
         </p:nvSpPr>
@@ -3202,7 +3514,7 @@
       </p:sp>
       <p:sp>
         <p:nvSpPr>
-          <p:cNvPr id="27" name="Shape 20"/>
+          <p:cNvPr id="36" name="Shape 29"/>
           <p:cNvSpPr/>
           <p:nvPr/>
         </p:nvSpPr>
@@ -3231,7 +3543,7 @@
       </p:sp>
       <p:sp>
         <p:nvSpPr>
-          <p:cNvPr id="28" name="Text 21"/>
+          <p:cNvPr id="37" name="Text 30"/>
           <p:cNvSpPr txBox="1"/>
           <p:nvPr/>
         </p:nvSpPr>
@@ -3322,7 +3634,7 @@
       </p:sp>
       <p:sp>
         <p:nvSpPr>
-          <p:cNvPr id="29" name="Text 22"/>
+          <p:cNvPr id="38" name="Text 31"/>
           <p:cNvSpPr txBox="1"/>
           <p:nvPr/>
         </p:nvSpPr>
